--- a/File-Based Database Management System (Main Presentation).pptx
+++ b/File-Based Database Management System (Main Presentation).pptx
@@ -318,6 +318,11 @@
       </a:defRPr>
     </a:lvl9pPr>
   </p:defaultTextStyle>
+  <p:extLst>
+    <p:ext uri="{EFAFB233-063F-42B5-8137-9DF3F51BA10A}">
+      <p15:sldGuideLst xmlns:p15="http://schemas.microsoft.com/office/powerpoint/2012/main"/>
+    </p:ext>
+  </p:extLst>
 </p:presentation>
 </file>
 
@@ -1212,7 +1217,7 @@
           </a:ln>
           <a:extLst>
             <a:ext uri="{C572A759-6A51-4108-AA02-DFA0A04FC94B}">
-              <ma14:wrappingTextBoxFlag xmlns:ma14="http://schemas.microsoft.com/office/mac/drawingml/2011/main" xmlns:a14="http://schemas.microsoft.com/office/drawing/2010/main" xmlns:m="http://schemas.openxmlformats.org/officeDocument/2006/math" xmlns="" val="1"/>
+              <ma14:wrappingTextBoxFlag xmlns="" xmlns:m="http://schemas.openxmlformats.org/officeDocument/2006/math" xmlns:a14="http://schemas.microsoft.com/office/drawing/2010/main" xmlns:ma14="http://schemas.microsoft.com/office/mac/drawingml/2011/main" val="1"/>
             </a:ext>
           </a:extLst>
         </p:spPr>
@@ -1249,7 +1254,7 @@
           </a:ln>
           <a:extLst>
             <a:ext uri="{C572A759-6A51-4108-AA02-DFA0A04FC94B}">
-              <ma14:wrappingTextBoxFlag xmlns:ma14="http://schemas.microsoft.com/office/mac/drawingml/2011/main" xmlns:a14="http://schemas.microsoft.com/office/drawing/2010/main" xmlns:m="http://schemas.openxmlformats.org/officeDocument/2006/math" xmlns="" val="1"/>
+              <ma14:wrappingTextBoxFlag xmlns="" xmlns:m="http://schemas.openxmlformats.org/officeDocument/2006/math" xmlns:a14="http://schemas.microsoft.com/office/drawing/2010/main" xmlns:ma14="http://schemas.microsoft.com/office/mac/drawingml/2011/main" val="1"/>
             </a:ext>
           </a:extLst>
         </p:spPr>
@@ -2102,7 +2107,7 @@
           </a:ln>
           <a:extLst>
             <a:ext uri="{C572A759-6A51-4108-AA02-DFA0A04FC94B}">
-              <ma14:wrappingTextBoxFlag xmlns:ma14="http://schemas.microsoft.com/office/mac/drawingml/2011/main" xmlns:a14="http://schemas.microsoft.com/office/drawing/2010/main" xmlns:m="http://schemas.openxmlformats.org/officeDocument/2006/math" xmlns="" val="1"/>
+              <ma14:wrappingTextBoxFlag xmlns="" xmlns:m="http://schemas.openxmlformats.org/officeDocument/2006/math" xmlns:a14="http://schemas.microsoft.com/office/drawing/2010/main" xmlns:ma14="http://schemas.microsoft.com/office/mac/drawingml/2011/main" val="1"/>
             </a:ext>
           </a:extLst>
         </p:spPr>
@@ -2522,7 +2527,7 @@
           </a:ln>
           <a:extLst>
             <a:ext uri="{C572A759-6A51-4108-AA02-DFA0A04FC94B}">
-              <ma14:wrappingTextBoxFlag xmlns:ma14="http://schemas.microsoft.com/office/mac/drawingml/2011/main" xmlns:a14="http://schemas.microsoft.com/office/drawing/2010/main" xmlns:m="http://schemas.openxmlformats.org/officeDocument/2006/math" xmlns="" val="1"/>
+              <ma14:wrappingTextBoxFlag xmlns="" xmlns:m="http://schemas.openxmlformats.org/officeDocument/2006/math" xmlns:a14="http://schemas.microsoft.com/office/drawing/2010/main" xmlns:ma14="http://schemas.microsoft.com/office/mac/drawingml/2011/main" val="1"/>
             </a:ext>
           </a:extLst>
         </p:spPr>
@@ -2644,7 +2649,7 @@
           </a:ln>
           <a:extLst>
             <a:ext uri="{C572A759-6A51-4108-AA02-DFA0A04FC94B}">
-              <ma14:wrappingTextBoxFlag xmlns:ma14="http://schemas.microsoft.com/office/mac/drawingml/2011/main" xmlns:a14="http://schemas.microsoft.com/office/drawing/2010/main" xmlns:m="http://schemas.openxmlformats.org/officeDocument/2006/math" xmlns="" val="1"/>
+              <ma14:wrappingTextBoxFlag xmlns="" xmlns:m="http://schemas.openxmlformats.org/officeDocument/2006/math" xmlns:a14="http://schemas.microsoft.com/office/drawing/2010/main" xmlns:ma14="http://schemas.microsoft.com/office/mac/drawingml/2011/main" val="1"/>
             </a:ext>
           </a:extLst>
         </p:spPr>
@@ -2737,7 +2742,7 @@
           </a:ln>
           <a:extLst>
             <a:ext uri="{C572A759-6A51-4108-AA02-DFA0A04FC94B}">
-              <ma14:wrappingTextBoxFlag xmlns:ma14="http://schemas.microsoft.com/office/mac/drawingml/2011/main" xmlns:a14="http://schemas.microsoft.com/office/drawing/2010/main" xmlns:m="http://schemas.openxmlformats.org/officeDocument/2006/math" xmlns="" val="1"/>
+              <ma14:wrappingTextBoxFlag xmlns="" xmlns:m="http://schemas.openxmlformats.org/officeDocument/2006/math" xmlns:a14="http://schemas.microsoft.com/office/drawing/2010/main" xmlns:ma14="http://schemas.microsoft.com/office/mac/drawingml/2011/main" val="1"/>
             </a:ext>
           </a:extLst>
         </p:spPr>
@@ -3188,7 +3193,7 @@
           </a:effectLst>
           <a:extLst>
             <a:ext uri="{C572A759-6A51-4108-AA02-DFA0A04FC94B}">
-              <ma14:wrappingTextBoxFlag xmlns:ma14="http://schemas.microsoft.com/office/mac/drawingml/2011/main" xmlns:a14="http://schemas.microsoft.com/office/drawing/2010/main" xmlns:m="http://schemas.openxmlformats.org/officeDocument/2006/math" xmlns="" val="1"/>
+              <ma14:wrappingTextBoxFlag xmlns="" xmlns:m="http://schemas.openxmlformats.org/officeDocument/2006/math" xmlns:a14="http://schemas.microsoft.com/office/drawing/2010/main" xmlns:ma14="http://schemas.microsoft.com/office/mac/drawingml/2011/main" val="1"/>
             </a:ext>
           </a:extLst>
         </p:spPr>
@@ -3774,7 +3779,7 @@
           </a:ln>
           <a:extLst>
             <a:ext uri="{C572A759-6A51-4108-AA02-DFA0A04FC94B}">
-              <ma14:wrappingTextBoxFlag xmlns:ma14="http://schemas.microsoft.com/office/mac/drawingml/2011/main" xmlns:a14="http://schemas.microsoft.com/office/drawing/2010/main" xmlns:m="http://schemas.openxmlformats.org/officeDocument/2006/math" xmlns="" val="1"/>
+              <ma14:wrappingTextBoxFlag xmlns="" xmlns:m="http://schemas.openxmlformats.org/officeDocument/2006/math" xmlns:a14="http://schemas.microsoft.com/office/drawing/2010/main" xmlns:ma14="http://schemas.microsoft.com/office/mac/drawingml/2011/main" val="1"/>
             </a:ext>
           </a:extLst>
         </p:spPr>
@@ -3869,7 +3874,7 @@
           </a:ln>
           <a:extLst>
             <a:ext uri="{C572A759-6A51-4108-AA02-DFA0A04FC94B}">
-              <ma14:wrappingTextBoxFlag xmlns:ma14="http://schemas.microsoft.com/office/mac/drawingml/2011/main" xmlns:a14="http://schemas.microsoft.com/office/drawing/2010/main" xmlns:m="http://schemas.openxmlformats.org/officeDocument/2006/math" xmlns="" val="1"/>
+              <ma14:wrappingTextBoxFlag xmlns="" xmlns:m="http://schemas.openxmlformats.org/officeDocument/2006/math" xmlns:a14="http://schemas.microsoft.com/office/drawing/2010/main" xmlns:ma14="http://schemas.microsoft.com/office/mac/drawingml/2011/main" val="1"/>
             </a:ext>
           </a:extLst>
         </p:spPr>
@@ -4312,7 +4317,7 @@
           </a:ln>
           <a:extLst>
             <a:ext uri="{C572A759-6A51-4108-AA02-DFA0A04FC94B}">
-              <ma14:wrappingTextBoxFlag xmlns:ma14="http://schemas.microsoft.com/office/mac/drawingml/2011/main" xmlns:a14="http://schemas.microsoft.com/office/drawing/2010/main" xmlns:m="http://schemas.openxmlformats.org/officeDocument/2006/math" xmlns="" val="1"/>
+              <ma14:wrappingTextBoxFlag xmlns="" xmlns:m="http://schemas.openxmlformats.org/officeDocument/2006/math" xmlns:a14="http://schemas.microsoft.com/office/drawing/2010/main" xmlns:ma14="http://schemas.microsoft.com/office/mac/drawingml/2011/main" val="1"/>
             </a:ext>
           </a:extLst>
         </p:spPr>
@@ -4382,7 +4387,7 @@
           </a:ln>
           <a:extLst>
             <a:ext uri="{C572A759-6A51-4108-AA02-DFA0A04FC94B}">
-              <ma14:wrappingTextBoxFlag xmlns:ma14="http://schemas.microsoft.com/office/mac/drawingml/2011/main" xmlns:a14="http://schemas.microsoft.com/office/drawing/2010/main" xmlns:m="http://schemas.openxmlformats.org/officeDocument/2006/math" xmlns="" val="1"/>
+              <ma14:wrappingTextBoxFlag xmlns="" xmlns:m="http://schemas.openxmlformats.org/officeDocument/2006/math" xmlns:a14="http://schemas.microsoft.com/office/drawing/2010/main" xmlns:ma14="http://schemas.microsoft.com/office/mac/drawingml/2011/main" val="1"/>
             </a:ext>
           </a:extLst>
         </p:spPr>
@@ -4464,7 +4469,7 @@
           </a:ln>
           <a:extLst>
             <a:ext uri="{C572A759-6A51-4108-AA02-DFA0A04FC94B}">
-              <ma14:wrappingTextBoxFlag xmlns:ma14="http://schemas.microsoft.com/office/mac/drawingml/2011/main" xmlns:a14="http://schemas.microsoft.com/office/drawing/2010/main" xmlns:m="http://schemas.openxmlformats.org/officeDocument/2006/math" xmlns="" val="1"/>
+              <ma14:wrappingTextBoxFlag xmlns="" xmlns:m="http://schemas.openxmlformats.org/officeDocument/2006/math" xmlns:a14="http://schemas.microsoft.com/office/drawing/2010/main" xmlns:ma14="http://schemas.microsoft.com/office/mac/drawingml/2011/main" val="1"/>
             </a:ext>
           </a:extLst>
         </p:spPr>
@@ -4511,7 +4516,9 @@
           </a:prstGeom>
         </p:spPr>
         <p:txBody>
-          <a:bodyPr/>
+          <a:bodyPr>
+            <a:normAutofit/>
+          </a:bodyPr>
           <a:lstStyle>
             <a:lvl1pPr indent="11684" defTabSz="841247">
               <a:defRPr sz="4048" b="1" spc="-92">
@@ -4527,7 +4534,7 @@
           </a:lstStyle>
           <a:p>
             <a:r>
-              <a:rPr dirty="0"/>
+              <a:rPr sz="2800" dirty="0"/>
               <a:t>Project Idea</a:t>
             </a:r>
           </a:p>
@@ -4541,7 +4548,7 @@
         </p:nvSpPr>
         <p:spPr>
           <a:xfrm>
-            <a:off x="544763" y="1618430"/>
+            <a:off x="687398" y="1132854"/>
             <a:ext cx="5680088" cy="2954655"/>
           </a:xfrm>
           <a:prstGeom prst="rect">
@@ -4552,7 +4559,7 @@
           </a:ln>
           <a:extLst>
             <a:ext uri="{C572A759-6A51-4108-AA02-DFA0A04FC94B}">
-              <ma14:wrappingTextBoxFlag xmlns:ma14="http://schemas.microsoft.com/office/mac/drawingml/2011/main" xmlns:a14="http://schemas.microsoft.com/office/drawing/2010/main" xmlns:m="http://schemas.openxmlformats.org/officeDocument/2006/math" xmlns="" val="1"/>
+              <ma14:wrappingTextBoxFlag xmlns="" xmlns:m="http://schemas.openxmlformats.org/officeDocument/2006/math" xmlns:a14="http://schemas.microsoft.com/office/drawing/2010/main" xmlns:ma14="http://schemas.microsoft.com/office/mac/drawingml/2011/main" val="1"/>
             </a:ext>
           </a:extLst>
         </p:spPr>
@@ -4761,8 +4768,8 @@
         </p:nvSpPr>
         <p:spPr>
           <a:xfrm>
-            <a:off x="544763" y="1140533"/>
-            <a:ext cx="3016996" cy="523220"/>
+            <a:off x="667394" y="935614"/>
+            <a:ext cx="3016996" cy="400110"/>
           </a:xfrm>
           <a:prstGeom prst="rect">
             <a:avLst/>
@@ -4772,7 +4779,7 @@
           </a:ln>
           <a:extLst>
             <a:ext uri="{C572A759-6A51-4108-AA02-DFA0A04FC94B}">
-              <ma14:wrappingTextBoxFlag xmlns:ma14="http://schemas.microsoft.com/office/mac/drawingml/2011/main" xmlns:a14="http://schemas.microsoft.com/office/drawing/2010/main" xmlns:m="http://schemas.openxmlformats.org/officeDocument/2006/math" xmlns="" val="1"/>
+              <ma14:wrappingTextBoxFlag xmlns="" xmlns:m="http://schemas.openxmlformats.org/officeDocument/2006/math" xmlns:a14="http://schemas.microsoft.com/office/drawing/2010/main" xmlns:ma14="http://schemas.microsoft.com/office/mac/drawingml/2011/main" val="1"/>
             </a:ext>
           </a:extLst>
         </p:spPr>
@@ -4803,7 +4810,7 @@
               <a:buNone/>
             </a:pPr>
             <a:r>
-              <a:rPr sz="2800" dirty="0"/>
+              <a:rPr sz="2000" dirty="0"/>
               <a:t>What we built</a:t>
             </a:r>
           </a:p>
@@ -4889,7 +4896,7 @@
             <a:effectLst/>
             <a:extLst>
               <a:ext uri="{C572A759-6A51-4108-AA02-DFA0A04FC94B}">
-                <ma14:wrappingTextBoxFlag xmlns:ma14="http://schemas.microsoft.com/office/mac/drawingml/2011/main" xmlns:a14="http://schemas.microsoft.com/office/drawing/2010/main" xmlns:m="http://schemas.openxmlformats.org/officeDocument/2006/math" xmlns="" val="1"/>
+                <ma14:wrappingTextBoxFlag xmlns="" xmlns:m="http://schemas.openxmlformats.org/officeDocument/2006/math" xmlns:a14="http://schemas.microsoft.com/office/drawing/2010/main" xmlns:ma14="http://schemas.microsoft.com/office/mac/drawingml/2011/main" val="1"/>
               </a:ext>
             </a:extLst>
           </p:spPr>
@@ -5064,7 +5071,7 @@
             <a:effectLst/>
             <a:extLst>
               <a:ext uri="{C572A759-6A51-4108-AA02-DFA0A04FC94B}">
-                <ma14:wrappingTextBoxFlag xmlns:ma14="http://schemas.microsoft.com/office/mac/drawingml/2011/main" xmlns:a14="http://schemas.microsoft.com/office/drawing/2010/main" xmlns:m="http://schemas.openxmlformats.org/officeDocument/2006/math" xmlns="" val="1"/>
+                <ma14:wrappingTextBoxFlag xmlns="" xmlns:m="http://schemas.openxmlformats.org/officeDocument/2006/math" xmlns:a14="http://schemas.microsoft.com/office/drawing/2010/main" xmlns:ma14="http://schemas.microsoft.com/office/mac/drawingml/2011/main" val="1"/>
               </a:ext>
             </a:extLst>
           </p:spPr>
@@ -5203,7 +5210,7 @@
             <a:effectLst/>
             <a:extLst>
               <a:ext uri="{C572A759-6A51-4108-AA02-DFA0A04FC94B}">
-                <ma14:wrappingTextBoxFlag xmlns:ma14="http://schemas.microsoft.com/office/mac/drawingml/2011/main" xmlns:a14="http://schemas.microsoft.com/office/drawing/2010/main" xmlns:m="http://schemas.openxmlformats.org/officeDocument/2006/math" xmlns="" val="1"/>
+                <ma14:wrappingTextBoxFlag xmlns="" xmlns:m="http://schemas.openxmlformats.org/officeDocument/2006/math" xmlns:a14="http://schemas.microsoft.com/office/drawing/2010/main" xmlns:ma14="http://schemas.microsoft.com/office/mac/drawingml/2011/main" val="1"/>
               </a:ext>
             </a:extLst>
           </p:spPr>
@@ -5296,7 +5303,7 @@
           </a:ln>
           <a:extLst>
             <a:ext uri="{C572A759-6A51-4108-AA02-DFA0A04FC94B}">
-              <ma14:wrappingTextBoxFlag xmlns:ma14="http://schemas.microsoft.com/office/mac/drawingml/2011/main" xmlns:a14="http://schemas.microsoft.com/office/drawing/2010/main" xmlns:m="http://schemas.openxmlformats.org/officeDocument/2006/math" xmlns="" val="1"/>
+              <ma14:wrappingTextBoxFlag xmlns="" xmlns:m="http://schemas.openxmlformats.org/officeDocument/2006/math" xmlns:a14="http://schemas.microsoft.com/office/drawing/2010/main" xmlns:ma14="http://schemas.microsoft.com/office/mac/drawingml/2011/main" val="1"/>
             </a:ext>
           </a:extLst>
         </p:spPr>
@@ -5520,7 +5527,7 @@
           </a:ln>
           <a:extLst>
             <a:ext uri="{C572A759-6A51-4108-AA02-DFA0A04FC94B}">
-              <ma14:wrappingTextBoxFlag xmlns:ma14="http://schemas.microsoft.com/office/mac/drawingml/2011/main" xmlns:a14="http://schemas.microsoft.com/office/drawing/2010/main" xmlns:m="http://schemas.openxmlformats.org/officeDocument/2006/math" xmlns="" val="1"/>
+              <ma14:wrappingTextBoxFlag xmlns="" xmlns:m="http://schemas.openxmlformats.org/officeDocument/2006/math" xmlns:a14="http://schemas.microsoft.com/office/drawing/2010/main" xmlns:ma14="http://schemas.microsoft.com/office/mac/drawingml/2011/main" val="1"/>
             </a:ext>
           </a:extLst>
         </p:spPr>
@@ -5565,7 +5572,7 @@
           </a:ln>
           <a:extLst>
             <a:ext uri="{C572A759-6A51-4108-AA02-DFA0A04FC94B}">
-              <ma14:wrappingTextBoxFlag xmlns:ma14="http://schemas.microsoft.com/office/mac/drawingml/2011/main" xmlns:a14="http://schemas.microsoft.com/office/drawing/2010/main" xmlns:m="http://schemas.openxmlformats.org/officeDocument/2006/math" xmlns="" val="1"/>
+              <ma14:wrappingTextBoxFlag xmlns="" xmlns:m="http://schemas.openxmlformats.org/officeDocument/2006/math" xmlns:a14="http://schemas.microsoft.com/office/drawing/2010/main" xmlns:ma14="http://schemas.microsoft.com/office/mac/drawingml/2011/main" val="1"/>
             </a:ext>
           </a:extLst>
         </p:spPr>
@@ -5609,7 +5616,7 @@
           </a:ln>
           <a:extLst>
             <a:ext uri="{C572A759-6A51-4108-AA02-DFA0A04FC94B}">
-              <ma14:wrappingTextBoxFlag xmlns:ma14="http://schemas.microsoft.com/office/mac/drawingml/2011/main" xmlns:a14="http://schemas.microsoft.com/office/drawing/2010/main" xmlns:m="http://schemas.openxmlformats.org/officeDocument/2006/math" xmlns="" val="1"/>
+              <ma14:wrappingTextBoxFlag xmlns="" xmlns:m="http://schemas.openxmlformats.org/officeDocument/2006/math" xmlns:a14="http://schemas.microsoft.com/office/drawing/2010/main" xmlns:ma14="http://schemas.microsoft.com/office/mac/drawingml/2011/main" val="1"/>
             </a:ext>
           </a:extLst>
         </p:spPr>
@@ -5653,7 +5660,7 @@
           </a:ln>
           <a:extLst>
             <a:ext uri="{C572A759-6A51-4108-AA02-DFA0A04FC94B}">
-              <ma14:wrappingTextBoxFlag xmlns:ma14="http://schemas.microsoft.com/office/mac/drawingml/2011/main" xmlns:a14="http://schemas.microsoft.com/office/drawing/2010/main" xmlns:m="http://schemas.openxmlformats.org/officeDocument/2006/math" xmlns="" val="1"/>
+              <ma14:wrappingTextBoxFlag xmlns="" xmlns:m="http://schemas.openxmlformats.org/officeDocument/2006/math" xmlns:a14="http://schemas.microsoft.com/office/drawing/2010/main" xmlns:ma14="http://schemas.microsoft.com/office/mac/drawingml/2011/main" val="1"/>
             </a:ext>
           </a:extLst>
         </p:spPr>
@@ -5843,7 +5850,7 @@
           </a:ln>
           <a:extLst>
             <a:ext uri="{C572A759-6A51-4108-AA02-DFA0A04FC94B}">
-              <ma14:wrappingTextBoxFlag xmlns:ma14="http://schemas.microsoft.com/office/mac/drawingml/2011/main" xmlns:a14="http://schemas.microsoft.com/office/drawing/2010/main" xmlns:m="http://schemas.openxmlformats.org/officeDocument/2006/math" xmlns="" val="1"/>
+              <ma14:wrappingTextBoxFlag xmlns="" xmlns:m="http://schemas.openxmlformats.org/officeDocument/2006/math" xmlns:a14="http://schemas.microsoft.com/office/drawing/2010/main" xmlns:ma14="http://schemas.microsoft.com/office/mac/drawingml/2011/main" val="1"/>
             </a:ext>
           </a:extLst>
         </p:spPr>
@@ -5994,7 +6001,7 @@
             <a:effectLst/>
             <a:extLst>
               <a:ext uri="{C572A759-6A51-4108-AA02-DFA0A04FC94B}">
-                <ma14:wrappingTextBoxFlag xmlns:ma14="http://schemas.microsoft.com/office/mac/drawingml/2011/main" xmlns:a14="http://schemas.microsoft.com/office/drawing/2010/main" xmlns:m="http://schemas.openxmlformats.org/officeDocument/2006/math" xmlns="" val="1"/>
+                <ma14:wrappingTextBoxFlag xmlns="" xmlns:m="http://schemas.openxmlformats.org/officeDocument/2006/math" xmlns:a14="http://schemas.microsoft.com/office/drawing/2010/main" xmlns:ma14="http://schemas.microsoft.com/office/mac/drawingml/2011/main" val="1"/>
               </a:ext>
             </a:extLst>
           </p:spPr>
@@ -6149,7 +6156,7 @@
             <a:effectLst/>
             <a:extLst>
               <a:ext uri="{C572A759-6A51-4108-AA02-DFA0A04FC94B}">
-                <ma14:wrappingTextBoxFlag xmlns:ma14="http://schemas.microsoft.com/office/mac/drawingml/2011/main" xmlns:a14="http://schemas.microsoft.com/office/drawing/2010/main" xmlns:m="http://schemas.openxmlformats.org/officeDocument/2006/math" xmlns="" val="1"/>
+                <ma14:wrappingTextBoxFlag xmlns="" xmlns:m="http://schemas.openxmlformats.org/officeDocument/2006/math" xmlns:a14="http://schemas.microsoft.com/office/drawing/2010/main" xmlns:ma14="http://schemas.microsoft.com/office/mac/drawingml/2011/main" val="1"/>
               </a:ext>
             </a:extLst>
           </p:spPr>
@@ -6312,7 +6319,7 @@
             <a:effectLst/>
             <a:extLst>
               <a:ext uri="{C572A759-6A51-4108-AA02-DFA0A04FC94B}">
-                <ma14:wrappingTextBoxFlag xmlns:ma14="http://schemas.microsoft.com/office/mac/drawingml/2011/main" xmlns:a14="http://schemas.microsoft.com/office/drawing/2010/main" xmlns:m="http://schemas.openxmlformats.org/officeDocument/2006/math" xmlns="" val="1"/>
+                <ma14:wrappingTextBoxFlag xmlns="" xmlns:m="http://schemas.openxmlformats.org/officeDocument/2006/math" xmlns:a14="http://schemas.microsoft.com/office/drawing/2010/main" xmlns:ma14="http://schemas.microsoft.com/office/mac/drawingml/2011/main" val="1"/>
               </a:ext>
             </a:extLst>
           </p:spPr>
@@ -6446,7 +6453,7 @@
           </a:ln>
           <a:extLst>
             <a:ext uri="{C572A759-6A51-4108-AA02-DFA0A04FC94B}">
-              <ma14:wrappingTextBoxFlag xmlns:ma14="http://schemas.microsoft.com/office/mac/drawingml/2011/main" xmlns:a14="http://schemas.microsoft.com/office/drawing/2010/main" xmlns:m="http://schemas.openxmlformats.org/officeDocument/2006/math" xmlns="" val="1"/>
+              <ma14:wrappingTextBoxFlag xmlns="" xmlns:m="http://schemas.openxmlformats.org/officeDocument/2006/math" xmlns:a14="http://schemas.microsoft.com/office/drawing/2010/main" xmlns:ma14="http://schemas.microsoft.com/office/mac/drawingml/2011/main" val="1"/>
             </a:ext>
           </a:extLst>
         </p:spPr>
@@ -7247,7 +7254,7 @@
           </a:ln>
           <a:extLst>
             <a:ext uri="{C572A759-6A51-4108-AA02-DFA0A04FC94B}">
-              <ma14:wrappingTextBoxFlag xmlns:ma14="http://schemas.microsoft.com/office/mac/drawingml/2011/main" xmlns:a14="http://schemas.microsoft.com/office/drawing/2010/main" xmlns:m="http://schemas.openxmlformats.org/officeDocument/2006/math" xmlns="" val="1"/>
+              <ma14:wrappingTextBoxFlag xmlns="" xmlns:m="http://schemas.openxmlformats.org/officeDocument/2006/math" xmlns:a14="http://schemas.microsoft.com/office/drawing/2010/main" xmlns:ma14="http://schemas.microsoft.com/office/mac/drawingml/2011/main" val="1"/>
             </a:ext>
           </a:extLst>
         </p:spPr>
@@ -7301,7 +7308,7 @@
           </a:ln>
           <a:extLst>
             <a:ext uri="{C572A759-6A51-4108-AA02-DFA0A04FC94B}">
-              <ma14:wrappingTextBoxFlag xmlns:ma14="http://schemas.microsoft.com/office/mac/drawingml/2011/main" xmlns:a14="http://schemas.microsoft.com/office/drawing/2010/main" xmlns:m="http://schemas.openxmlformats.org/officeDocument/2006/math" xmlns="" val="1"/>
+              <ma14:wrappingTextBoxFlag xmlns="" xmlns:m="http://schemas.openxmlformats.org/officeDocument/2006/math" xmlns:a14="http://schemas.microsoft.com/office/drawing/2010/main" xmlns:ma14="http://schemas.microsoft.com/office/mac/drawingml/2011/main" val="1"/>
             </a:ext>
           </a:extLst>
         </p:spPr>
@@ -7494,7 +7501,7 @@
             <a:effectLst/>
             <a:extLst>
               <a:ext uri="{C572A759-6A51-4108-AA02-DFA0A04FC94B}">
-                <ma14:wrappingTextBoxFlag xmlns:ma14="http://schemas.microsoft.com/office/mac/drawingml/2011/main" xmlns:a14="http://schemas.microsoft.com/office/drawing/2010/main" xmlns:m="http://schemas.openxmlformats.org/officeDocument/2006/math" xmlns="" val="1"/>
+                <ma14:wrappingTextBoxFlag xmlns="" xmlns:m="http://schemas.openxmlformats.org/officeDocument/2006/math" xmlns:a14="http://schemas.microsoft.com/office/drawing/2010/main" xmlns:ma14="http://schemas.microsoft.com/office/mac/drawingml/2011/main" val="1"/>
               </a:ext>
             </a:extLst>
           </p:spPr>
@@ -7683,7 +7690,7 @@
             <a:effectLst/>
             <a:extLst>
               <a:ext uri="{C572A759-6A51-4108-AA02-DFA0A04FC94B}">
-                <ma14:wrappingTextBoxFlag xmlns:ma14="http://schemas.microsoft.com/office/mac/drawingml/2011/main" xmlns:a14="http://schemas.microsoft.com/office/drawing/2010/main" xmlns:m="http://schemas.openxmlformats.org/officeDocument/2006/math" xmlns="" val="1"/>
+                <ma14:wrappingTextBoxFlag xmlns="" xmlns:m="http://schemas.openxmlformats.org/officeDocument/2006/math" xmlns:a14="http://schemas.microsoft.com/office/drawing/2010/main" xmlns:ma14="http://schemas.microsoft.com/office/mac/drawingml/2011/main" val="1"/>
               </a:ext>
             </a:extLst>
           </p:spPr>
@@ -7941,7 +7948,7 @@
             <a:effectLst/>
             <a:extLst>
               <a:ext uri="{C572A759-6A51-4108-AA02-DFA0A04FC94B}">
-                <ma14:wrappingTextBoxFlag xmlns:ma14="http://schemas.microsoft.com/office/mac/drawingml/2011/main" xmlns:a14="http://schemas.microsoft.com/office/drawing/2010/main" xmlns:m="http://schemas.openxmlformats.org/officeDocument/2006/math" xmlns="" val="1"/>
+                <ma14:wrappingTextBoxFlag xmlns="" xmlns:m="http://schemas.openxmlformats.org/officeDocument/2006/math" xmlns:a14="http://schemas.microsoft.com/office/drawing/2010/main" xmlns:ma14="http://schemas.microsoft.com/office/mac/drawingml/2011/main" val="1"/>
               </a:ext>
             </a:extLst>
           </p:spPr>
@@ -8179,7 +8186,7 @@
           </a:ln>
           <a:extLst>
             <a:ext uri="{C572A759-6A51-4108-AA02-DFA0A04FC94B}">
-              <ma14:wrappingTextBoxFlag xmlns:ma14="http://schemas.microsoft.com/office/mac/drawingml/2011/main" xmlns:a14="http://schemas.microsoft.com/office/drawing/2010/main" xmlns:m="http://schemas.openxmlformats.org/officeDocument/2006/math" xmlns="" val="1"/>
+              <ma14:wrappingTextBoxFlag xmlns="" xmlns:m="http://schemas.openxmlformats.org/officeDocument/2006/math" xmlns:a14="http://schemas.microsoft.com/office/drawing/2010/main" xmlns:ma14="http://schemas.microsoft.com/office/mac/drawingml/2011/main" val="1"/>
             </a:ext>
           </a:extLst>
         </p:spPr>
@@ -8392,7 +8399,7 @@
           </a:ln>
           <a:extLst>
             <a:ext uri="{C572A759-6A51-4108-AA02-DFA0A04FC94B}">
-              <ma14:wrappingTextBoxFlag xmlns:ma14="http://schemas.microsoft.com/office/mac/drawingml/2011/main" xmlns:a14="http://schemas.microsoft.com/office/drawing/2010/main" xmlns:m="http://schemas.openxmlformats.org/officeDocument/2006/math" xmlns="" val="1"/>
+              <ma14:wrappingTextBoxFlag xmlns="" xmlns:m="http://schemas.openxmlformats.org/officeDocument/2006/math" xmlns:a14="http://schemas.microsoft.com/office/drawing/2010/main" xmlns:ma14="http://schemas.microsoft.com/office/mac/drawingml/2011/main" val="1"/>
             </a:ext>
           </a:extLst>
         </p:spPr>
@@ -8556,7 +8563,7 @@
           </a:ln>
           <a:extLst>
             <a:ext uri="{C572A759-6A51-4108-AA02-DFA0A04FC94B}">
-              <ma14:wrappingTextBoxFlag xmlns:ma14="http://schemas.microsoft.com/office/mac/drawingml/2011/main" xmlns:a14="http://schemas.microsoft.com/office/drawing/2010/main" xmlns:m="http://schemas.openxmlformats.org/officeDocument/2006/math" xmlns="" val="1"/>
+              <ma14:wrappingTextBoxFlag xmlns="" xmlns:m="http://schemas.openxmlformats.org/officeDocument/2006/math" xmlns:a14="http://schemas.microsoft.com/office/drawing/2010/main" xmlns:ma14="http://schemas.microsoft.com/office/mac/drawingml/2011/main" val="1"/>
             </a:ext>
           </a:extLst>
         </p:spPr>
@@ -8708,7 +8715,7 @@
           </a:ln>
           <a:extLst>
             <a:ext uri="{C572A759-6A51-4108-AA02-DFA0A04FC94B}">
-              <ma14:wrappingTextBoxFlag xmlns:ma14="http://schemas.microsoft.com/office/mac/drawingml/2011/main" xmlns:a14="http://schemas.microsoft.com/office/drawing/2010/main" xmlns:m="http://schemas.openxmlformats.org/officeDocument/2006/math" xmlns="" val="1"/>
+              <ma14:wrappingTextBoxFlag xmlns="" xmlns:m="http://schemas.openxmlformats.org/officeDocument/2006/math" xmlns:a14="http://schemas.microsoft.com/office/drawing/2010/main" xmlns:ma14="http://schemas.microsoft.com/office/mac/drawingml/2011/main" val="1"/>
             </a:ext>
           </a:extLst>
         </p:spPr>
@@ -8849,7 +8856,7 @@
             <a:effectLst/>
             <a:extLst>
               <a:ext uri="{C572A759-6A51-4108-AA02-DFA0A04FC94B}">
-                <ma14:wrappingTextBoxFlag xmlns:ma14="http://schemas.microsoft.com/office/mac/drawingml/2011/main" xmlns:a14="http://schemas.microsoft.com/office/drawing/2010/main" xmlns:m="http://schemas.openxmlformats.org/officeDocument/2006/math" xmlns="" val="1"/>
+                <ma14:wrappingTextBoxFlag xmlns="" xmlns:m="http://schemas.openxmlformats.org/officeDocument/2006/math" xmlns:a14="http://schemas.microsoft.com/office/drawing/2010/main" xmlns:ma14="http://schemas.microsoft.com/office/mac/drawingml/2011/main" val="1"/>
               </a:ext>
             </a:extLst>
           </p:spPr>
@@ -9033,7 +9040,7 @@
             <a:effectLst/>
             <a:extLst>
               <a:ext uri="{C572A759-6A51-4108-AA02-DFA0A04FC94B}">
-                <ma14:wrappingTextBoxFlag xmlns:ma14="http://schemas.microsoft.com/office/mac/drawingml/2011/main" xmlns:a14="http://schemas.microsoft.com/office/drawing/2010/main" xmlns:m="http://schemas.openxmlformats.org/officeDocument/2006/math" xmlns="" val="1"/>
+                <ma14:wrappingTextBoxFlag xmlns="" xmlns:m="http://schemas.openxmlformats.org/officeDocument/2006/math" xmlns:a14="http://schemas.microsoft.com/office/drawing/2010/main" xmlns:ma14="http://schemas.microsoft.com/office/mac/drawingml/2011/main" val="1"/>
               </a:ext>
             </a:extLst>
           </p:spPr>
@@ -9156,7 +9163,7 @@
             <a:effectLst/>
             <a:extLst>
               <a:ext uri="{C572A759-6A51-4108-AA02-DFA0A04FC94B}">
-                <ma14:wrappingTextBoxFlag xmlns:ma14="http://schemas.microsoft.com/office/mac/drawingml/2011/main" xmlns:a14="http://schemas.microsoft.com/office/drawing/2010/main" xmlns:m="http://schemas.openxmlformats.org/officeDocument/2006/math" xmlns="" val="1"/>
+                <ma14:wrappingTextBoxFlag xmlns="" xmlns:m="http://schemas.openxmlformats.org/officeDocument/2006/math" xmlns:a14="http://schemas.microsoft.com/office/drawing/2010/main" xmlns:ma14="http://schemas.microsoft.com/office/mac/drawingml/2011/main" val="1"/>
               </a:ext>
             </a:extLst>
           </p:spPr>
@@ -9328,7 +9335,7 @@
             <a:effectLst/>
             <a:extLst>
               <a:ext uri="{C572A759-6A51-4108-AA02-DFA0A04FC94B}">
-                <ma14:wrappingTextBoxFlag xmlns:ma14="http://schemas.microsoft.com/office/mac/drawingml/2011/main" xmlns:a14="http://schemas.microsoft.com/office/drawing/2010/main" xmlns:m="http://schemas.openxmlformats.org/officeDocument/2006/math" xmlns="" val="1"/>
+                <ma14:wrappingTextBoxFlag xmlns="" xmlns:m="http://schemas.openxmlformats.org/officeDocument/2006/math" xmlns:a14="http://schemas.microsoft.com/office/drawing/2010/main" xmlns:ma14="http://schemas.microsoft.com/office/mac/drawingml/2011/main" val="1"/>
               </a:ext>
             </a:extLst>
           </p:spPr>
@@ -9430,7 +9437,7 @@
           </a:ln>
           <a:extLst>
             <a:ext uri="{C572A759-6A51-4108-AA02-DFA0A04FC94B}">
-              <ma14:wrappingTextBoxFlag xmlns:ma14="http://schemas.microsoft.com/office/mac/drawingml/2011/main" xmlns:a14="http://schemas.microsoft.com/office/drawing/2010/main" xmlns:m="http://schemas.openxmlformats.org/officeDocument/2006/math" xmlns="" val="1"/>
+              <ma14:wrappingTextBoxFlag xmlns="" xmlns:m="http://schemas.openxmlformats.org/officeDocument/2006/math" xmlns:a14="http://schemas.microsoft.com/office/drawing/2010/main" xmlns:ma14="http://schemas.microsoft.com/office/mac/drawingml/2011/main" val="1"/>
             </a:ext>
           </a:extLst>
         </p:spPr>
@@ -9624,7 +9631,7 @@
           </a:ln>
           <a:extLst>
             <a:ext uri="{C572A759-6A51-4108-AA02-DFA0A04FC94B}">
-              <ma14:wrappingTextBoxFlag xmlns:ma14="http://schemas.microsoft.com/office/mac/drawingml/2011/main" xmlns:a14="http://schemas.microsoft.com/office/drawing/2010/main" xmlns:m="http://schemas.openxmlformats.org/officeDocument/2006/math" xmlns="" val="1"/>
+              <ma14:wrappingTextBoxFlag xmlns="" xmlns:m="http://schemas.openxmlformats.org/officeDocument/2006/math" xmlns:a14="http://schemas.microsoft.com/office/drawing/2010/main" xmlns:ma14="http://schemas.microsoft.com/office/mac/drawingml/2011/main" val="1"/>
             </a:ext>
           </a:extLst>
         </p:spPr>
@@ -9763,7 +9770,7 @@
           </a:ln>
           <a:extLst>
             <a:ext uri="{C572A759-6A51-4108-AA02-DFA0A04FC94B}">
-              <ma14:wrappingTextBoxFlag xmlns:ma14="http://schemas.microsoft.com/office/mac/drawingml/2011/main" xmlns:a14="http://schemas.microsoft.com/office/drawing/2010/main" xmlns:m="http://schemas.openxmlformats.org/officeDocument/2006/math" xmlns="" val="1"/>
+              <ma14:wrappingTextBoxFlag xmlns="" xmlns:m="http://schemas.openxmlformats.org/officeDocument/2006/math" xmlns:a14="http://schemas.microsoft.com/office/drawing/2010/main" xmlns:ma14="http://schemas.microsoft.com/office/mac/drawingml/2011/main" val="1"/>
             </a:ext>
           </a:extLst>
         </p:spPr>
@@ -10002,7 +10009,7 @@
           </a:ln>
           <a:extLst>
             <a:ext uri="{C572A759-6A51-4108-AA02-DFA0A04FC94B}">
-              <ma14:wrappingTextBoxFlag xmlns:ma14="http://schemas.microsoft.com/office/mac/drawingml/2011/main" xmlns:a14="http://schemas.microsoft.com/office/drawing/2010/main" xmlns:m="http://schemas.openxmlformats.org/officeDocument/2006/math" xmlns="" val="1"/>
+              <ma14:wrappingTextBoxFlag xmlns="" xmlns:m="http://schemas.openxmlformats.org/officeDocument/2006/math" xmlns:a14="http://schemas.microsoft.com/office/drawing/2010/main" xmlns:ma14="http://schemas.microsoft.com/office/mac/drawingml/2011/main" val="1"/>
             </a:ext>
           </a:extLst>
         </p:spPr>
@@ -10120,7 +10127,7 @@
             <a:effectLst/>
             <a:extLst>
               <a:ext uri="{C572A759-6A51-4108-AA02-DFA0A04FC94B}">
-                <ma14:wrappingTextBoxFlag xmlns:ma14="http://schemas.microsoft.com/office/mac/drawingml/2011/main" xmlns:a14="http://schemas.microsoft.com/office/drawing/2010/main" xmlns:m="http://schemas.openxmlformats.org/officeDocument/2006/math" xmlns="" val="1"/>
+                <ma14:wrappingTextBoxFlag xmlns="" xmlns:m="http://schemas.openxmlformats.org/officeDocument/2006/math" xmlns:a14="http://schemas.microsoft.com/office/drawing/2010/main" xmlns:ma14="http://schemas.microsoft.com/office/mac/drawingml/2011/main" val="1"/>
               </a:ext>
             </a:extLst>
           </p:spPr>
@@ -10265,7 +10272,7 @@
             <a:effectLst/>
             <a:extLst>
               <a:ext uri="{C572A759-6A51-4108-AA02-DFA0A04FC94B}">
-                <ma14:wrappingTextBoxFlag xmlns:ma14="http://schemas.microsoft.com/office/mac/drawingml/2011/main" xmlns:a14="http://schemas.microsoft.com/office/drawing/2010/main" xmlns:m="http://schemas.openxmlformats.org/officeDocument/2006/math" xmlns="" val="1"/>
+                <ma14:wrappingTextBoxFlag xmlns="" xmlns:m="http://schemas.openxmlformats.org/officeDocument/2006/math" xmlns:a14="http://schemas.microsoft.com/office/drawing/2010/main" xmlns:ma14="http://schemas.microsoft.com/office/mac/drawingml/2011/main" val="1"/>
               </a:ext>
             </a:extLst>
           </p:spPr>
@@ -10354,7 +10361,7 @@
           </a:ln>
           <a:extLst>
             <a:ext uri="{C572A759-6A51-4108-AA02-DFA0A04FC94B}">
-              <ma14:wrappingTextBoxFlag xmlns:ma14="http://schemas.microsoft.com/office/mac/drawingml/2011/main" xmlns:a14="http://schemas.microsoft.com/office/drawing/2010/main" xmlns:m="http://schemas.openxmlformats.org/officeDocument/2006/math" xmlns="" val="1"/>
+              <ma14:wrappingTextBoxFlag xmlns="" xmlns:m="http://schemas.openxmlformats.org/officeDocument/2006/math" xmlns:a14="http://schemas.microsoft.com/office/drawing/2010/main" xmlns:ma14="http://schemas.microsoft.com/office/mac/drawingml/2011/main" val="1"/>
             </a:ext>
           </a:extLst>
         </p:spPr>
@@ -10472,7 +10479,7 @@
             <a:effectLst/>
             <a:extLst>
               <a:ext uri="{C572A759-6A51-4108-AA02-DFA0A04FC94B}">
-                <ma14:wrappingTextBoxFlag xmlns:ma14="http://schemas.microsoft.com/office/mac/drawingml/2011/main" xmlns:a14="http://schemas.microsoft.com/office/drawing/2010/main" xmlns:m="http://schemas.openxmlformats.org/officeDocument/2006/math" xmlns="" val="1"/>
+                <ma14:wrappingTextBoxFlag xmlns="" xmlns:m="http://schemas.openxmlformats.org/officeDocument/2006/math" xmlns:a14="http://schemas.microsoft.com/office/drawing/2010/main" xmlns:ma14="http://schemas.microsoft.com/office/mac/drawingml/2011/main" val="1"/>
               </a:ext>
             </a:extLst>
           </p:spPr>
@@ -10581,7 +10588,7 @@
             <a:effectLst/>
             <a:extLst>
               <a:ext uri="{C572A759-6A51-4108-AA02-DFA0A04FC94B}">
-                <ma14:wrappingTextBoxFlag xmlns:ma14="http://schemas.microsoft.com/office/mac/drawingml/2011/main" xmlns:a14="http://schemas.microsoft.com/office/drawing/2010/main" xmlns:m="http://schemas.openxmlformats.org/officeDocument/2006/math" xmlns="" val="1"/>
+                <ma14:wrappingTextBoxFlag xmlns="" xmlns:m="http://schemas.openxmlformats.org/officeDocument/2006/math" xmlns:a14="http://schemas.microsoft.com/office/drawing/2010/main" xmlns:ma14="http://schemas.microsoft.com/office/mac/drawingml/2011/main" val="1"/>
               </a:ext>
             </a:extLst>
           </p:spPr>
@@ -10690,7 +10697,7 @@
             <a:effectLst/>
             <a:extLst>
               <a:ext uri="{C572A759-6A51-4108-AA02-DFA0A04FC94B}">
-                <ma14:wrappingTextBoxFlag xmlns:ma14="http://schemas.microsoft.com/office/mac/drawingml/2011/main" xmlns:a14="http://schemas.microsoft.com/office/drawing/2010/main" xmlns:m="http://schemas.openxmlformats.org/officeDocument/2006/math" xmlns="" val="1"/>
+                <ma14:wrappingTextBoxFlag xmlns="" xmlns:m="http://schemas.openxmlformats.org/officeDocument/2006/math" xmlns:a14="http://schemas.microsoft.com/office/drawing/2010/main" xmlns:ma14="http://schemas.microsoft.com/office/mac/drawingml/2011/main" val="1"/>
               </a:ext>
             </a:extLst>
           </p:spPr>
@@ -11226,7 +11233,7 @@
           </a:ln>
           <a:extLst>
             <a:ext uri="{C572A759-6A51-4108-AA02-DFA0A04FC94B}">
-              <ma14:wrappingTextBoxFlag xmlns:ma14="http://schemas.microsoft.com/office/mac/drawingml/2011/main" xmlns:a14="http://schemas.microsoft.com/office/drawing/2010/main" xmlns:m="http://schemas.openxmlformats.org/officeDocument/2006/math" xmlns="" val="1"/>
+              <ma14:wrappingTextBoxFlag xmlns="" xmlns:m="http://schemas.openxmlformats.org/officeDocument/2006/math" xmlns:a14="http://schemas.microsoft.com/office/drawing/2010/main" xmlns:ma14="http://schemas.microsoft.com/office/mac/drawingml/2011/main" val="1"/>
             </a:ext>
           </a:extLst>
         </p:spPr>
@@ -11315,7 +11322,9 @@
           </a:prstGeom>
         </p:spPr>
         <p:txBody>
-          <a:bodyPr/>
+          <a:bodyPr>
+            <a:normAutofit/>
+          </a:bodyPr>
           <a:lstStyle>
             <a:lvl1pPr indent="11684" defTabSz="841247">
               <a:defRPr sz="4048" b="1" spc="-92">
@@ -11331,7 +11340,7 @@
           </a:lstStyle>
           <a:p>
             <a:r>
-              <a:rPr dirty="0"/>
+              <a:rPr sz="3200" dirty="0"/>
               <a:t>Conclusion</a:t>
             </a:r>
           </a:p>
@@ -11356,7 +11365,7 @@
           </a:ln>
           <a:extLst>
             <a:ext uri="{C572A759-6A51-4108-AA02-DFA0A04FC94B}">
-              <ma14:wrappingTextBoxFlag xmlns:ma14="http://schemas.microsoft.com/office/mac/drawingml/2011/main" xmlns:a14="http://schemas.microsoft.com/office/drawing/2010/main" xmlns:m="http://schemas.openxmlformats.org/officeDocument/2006/math" xmlns="" val="1"/>
+              <ma14:wrappingTextBoxFlag xmlns="" xmlns:m="http://schemas.openxmlformats.org/officeDocument/2006/math" xmlns:a14="http://schemas.microsoft.com/office/drawing/2010/main" xmlns:ma14="http://schemas.microsoft.com/office/mac/drawingml/2011/main" val="1"/>
             </a:ext>
           </a:extLst>
         </p:spPr>
@@ -11638,7 +11647,7 @@
           </a:ln>
           <a:extLst>
             <a:ext uri="{C572A759-6A51-4108-AA02-DFA0A04FC94B}">
-              <ma14:wrappingTextBoxFlag xmlns:ma14="http://schemas.microsoft.com/office/mac/drawingml/2011/main" xmlns:a14="http://schemas.microsoft.com/office/drawing/2010/main" xmlns:m="http://schemas.openxmlformats.org/officeDocument/2006/math" xmlns="" val="1"/>
+              <ma14:wrappingTextBoxFlag xmlns="" xmlns:m="http://schemas.openxmlformats.org/officeDocument/2006/math" xmlns:a14="http://schemas.microsoft.com/office/drawing/2010/main" xmlns:ma14="http://schemas.microsoft.com/office/mac/drawingml/2011/main" val="1"/>
             </a:ext>
           </a:extLst>
         </p:spPr>
@@ -11952,7 +11961,7 @@
           </a:ln>
           <a:extLst>
             <a:ext uri="{C572A759-6A51-4108-AA02-DFA0A04FC94B}">
-              <ma14:wrappingTextBoxFlag xmlns:ma14="http://schemas.microsoft.com/office/mac/drawingml/2011/main" xmlns:a14="http://schemas.microsoft.com/office/drawing/2010/main" xmlns:m="http://schemas.openxmlformats.org/officeDocument/2006/math" xmlns="" val="1"/>
+              <ma14:wrappingTextBoxFlag xmlns="" xmlns:m="http://schemas.openxmlformats.org/officeDocument/2006/math" xmlns:a14="http://schemas.microsoft.com/office/drawing/2010/main" xmlns:ma14="http://schemas.microsoft.com/office/mac/drawingml/2011/main" val="1"/>
             </a:ext>
           </a:extLst>
         </p:spPr>
